--- a/docs/presentation/MSc_BorisLetic.pptx
+++ b/docs/presentation/MSc_BorisLetic.pptx
@@ -703,7 +703,7 @@
                   </a:defRPr>
                 </a:pPr>
                 <a:r>
-                  <a:rPr sz="1100" b="0" i="0" u="none" strike="noStrike">
+                  <a:rPr lang="en-US" sz="1100" b="0" i="0" u="none" strike="noStrike">
                     <a:solidFill>
                       <a:srgbClr val="5B6B7F"/>
                     </a:solidFill>
@@ -1451,7 +1451,7 @@
                   </a:defRPr>
                 </a:pPr>
                 <a:r>
-                  <a:rPr sz="1100" b="0" i="0" u="none" strike="noStrike">
+                  <a:rPr lang="en-US" sz="1100" b="0" i="0" u="none" strike="noStrike">
                     <a:solidFill>
                       <a:srgbClr val="5B6B7F"/>
                     </a:solidFill>
@@ -6615,7 +6615,7 @@
         <p:spPr>
           <a:xfrm>
             <a:off x="548640" y="6419088"/>
-            <a:ext cx="7315200" cy="237744"/>
+            <a:ext cx="7922500" cy="237744"/>
           </a:xfrm>
           <a:prstGeom prst="rect">
             <a:avLst/>
@@ -6627,9 +6627,17 @@
           <a:bodyPr wrap="square" lIns="0" tIns="0" rIns="0" bIns="0" rtlCol="0" anchor="ctr"/>
           <a:lstStyle/>
           <a:p>
-            <a:pPr marL="0" indent="0">
-              <a:buNone/>
-            </a:pPr>
+            <a:r>
+              <a:rPr lang="sr-Cyrl-RS" sz="1000" dirty="0">
+                <a:solidFill>
+                  <a:srgbClr val="5B6B7F"/>
+                </a:solidFill>
+                <a:latin typeface="Calibri" pitchFamily="34" charset="0"/>
+                <a:ea typeface="Calibri" pitchFamily="34" charset="-122"/>
+                <a:cs typeface="Calibri" pitchFamily="34" charset="-120"/>
+              </a:rPr>
+              <a:t>Борис</a:t>
+            </a:r>
             <a:r>
               <a:rPr lang="en-US" sz="1000" dirty="0">
                 <a:solidFill>
@@ -6639,7 +6647,40 @@
                 <a:ea typeface="Calibri" pitchFamily="34" charset="-122"/>
                 <a:cs typeface="Calibri" pitchFamily="34" charset="-120"/>
               </a:rPr>
-              <a:t>Б. Летић  ·  Прекомерно одбијање код локалних језичких модела</a:t>
+              <a:t> </a:t>
+            </a:r>
+            <a:r>
+              <a:rPr lang="sr-Cyrl-RS" sz="1000" dirty="0">
+                <a:solidFill>
+                  <a:srgbClr val="5B6B7F"/>
+                </a:solidFill>
+                <a:latin typeface="Calibri" pitchFamily="34" charset="0"/>
+                <a:ea typeface="Calibri" pitchFamily="34" charset="-122"/>
+                <a:cs typeface="Calibri" pitchFamily="34" charset="-120"/>
+              </a:rPr>
+              <a:t>Летић</a:t>
+            </a:r>
+            <a:r>
+              <a:rPr lang="en-US" sz="1000" dirty="0">
+                <a:solidFill>
+                  <a:srgbClr val="5B6B7F"/>
+                </a:solidFill>
+                <a:latin typeface="Calibri" pitchFamily="34" charset="0"/>
+                <a:ea typeface="Calibri" pitchFamily="34" charset="-122"/>
+                <a:cs typeface="Calibri" pitchFamily="34" charset="-120"/>
+              </a:rPr>
+              <a:t>  ·  </a:t>
+            </a:r>
+            <a:r>
+              <a:rPr lang="sr-Cyrl-RS" sz="1000" dirty="0">
+                <a:solidFill>
+                  <a:srgbClr val="5B6B7F"/>
+                </a:solidFill>
+                <a:latin typeface="Calibri" pitchFamily="34" charset="0"/>
+                <a:ea typeface="Calibri" pitchFamily="34" charset="-122"/>
+                <a:cs typeface="Calibri" pitchFamily="34" charset="-120"/>
+              </a:rPr>
+              <a:t>Прекомерно одбијање и компромис између поравнања и корисности код ресурсно ограничених локалних језичких модела</a:t>
             </a:r>
             <a:endParaRPr lang="en-US" sz="1000" dirty="0"/>
           </a:p>
@@ -6700,7 +6741,7 @@
         </p:nvGraphicFramePr>
         <p:xfrm>
           <a:off x="548640" y="1554480"/>
-          <a:ext cx="11109960" cy="914400"/>
+          <a:ext cx="11109960" cy="3584448"/>
         </p:xfrm>
         <a:graphic>
           <a:graphicData uri="http://schemas.openxmlformats.org/drawingml/2006/table">
@@ -9375,7 +9416,7 @@
         <p:spPr>
           <a:xfrm>
             <a:off x="548640" y="6419088"/>
-            <a:ext cx="7315200" cy="237744"/>
+            <a:ext cx="7767224" cy="237744"/>
           </a:xfrm>
           <a:prstGeom prst="rect">
             <a:avLst/>
@@ -9387,9 +9428,17 @@
           <a:bodyPr wrap="square" lIns="0" tIns="0" rIns="0" bIns="0" rtlCol="0" anchor="ctr"/>
           <a:lstStyle/>
           <a:p>
-            <a:pPr marL="0" indent="0">
-              <a:buNone/>
-            </a:pPr>
+            <a:r>
+              <a:rPr lang="sr-Cyrl-RS" sz="1000" dirty="0">
+                <a:solidFill>
+                  <a:srgbClr val="5B6B7F"/>
+                </a:solidFill>
+                <a:latin typeface="Calibri" pitchFamily="34" charset="0"/>
+                <a:ea typeface="Calibri" pitchFamily="34" charset="-122"/>
+                <a:cs typeface="Calibri" pitchFamily="34" charset="-120"/>
+              </a:rPr>
+              <a:t>Борис</a:t>
+            </a:r>
             <a:r>
               <a:rPr lang="en-US" sz="1000" dirty="0">
                 <a:solidFill>
@@ -9399,7 +9448,40 @@
                 <a:ea typeface="Calibri" pitchFamily="34" charset="-122"/>
                 <a:cs typeface="Calibri" pitchFamily="34" charset="-120"/>
               </a:rPr>
-              <a:t>Б. Летић  ·  Прекомерно одбијање код локалних језичких модела</a:t>
+              <a:t> </a:t>
+            </a:r>
+            <a:r>
+              <a:rPr lang="sr-Cyrl-RS" sz="1000" dirty="0">
+                <a:solidFill>
+                  <a:srgbClr val="5B6B7F"/>
+                </a:solidFill>
+                <a:latin typeface="Calibri" pitchFamily="34" charset="0"/>
+                <a:ea typeface="Calibri" pitchFamily="34" charset="-122"/>
+                <a:cs typeface="Calibri" pitchFamily="34" charset="-120"/>
+              </a:rPr>
+              <a:t>Летић</a:t>
+            </a:r>
+            <a:r>
+              <a:rPr lang="en-US" sz="1000" dirty="0">
+                <a:solidFill>
+                  <a:srgbClr val="5B6B7F"/>
+                </a:solidFill>
+                <a:latin typeface="Calibri" pitchFamily="34" charset="0"/>
+                <a:ea typeface="Calibri" pitchFamily="34" charset="-122"/>
+                <a:cs typeface="Calibri" pitchFamily="34" charset="-120"/>
+              </a:rPr>
+              <a:t>  ·  </a:t>
+            </a:r>
+            <a:r>
+              <a:rPr lang="sr-Cyrl-RS" sz="1000" dirty="0">
+                <a:solidFill>
+                  <a:srgbClr val="5B6B7F"/>
+                </a:solidFill>
+                <a:latin typeface="Calibri" pitchFamily="34" charset="0"/>
+                <a:ea typeface="Calibri" pitchFamily="34" charset="-122"/>
+                <a:cs typeface="Calibri" pitchFamily="34" charset="-120"/>
+              </a:rPr>
+              <a:t>Прекомерно одбијање и компромис између поравнања и корисности код ресурсно ограничених локалних језичких модела</a:t>
             </a:r>
             <a:endParaRPr lang="en-US" sz="1000" dirty="0"/>
           </a:p>
@@ -10099,7 +10181,7 @@
         </p:nvGraphicFramePr>
         <p:xfrm>
           <a:off x="6355080" y="1554480"/>
-          <a:ext cx="5303520" cy="914400"/>
+          <a:ext cx="5303520" cy="3931920"/>
         </p:xfrm>
         <a:graphic>
           <a:graphicData uri="http://schemas.openxmlformats.org/drawingml/2006/table">
@@ -10998,8 +11080,8 @@
         </p:nvSpPr>
         <p:spPr>
           <a:xfrm>
-            <a:off x="548640" y="6419088"/>
-            <a:ext cx="7315200" cy="237744"/>
+            <a:off x="548639" y="6419088"/>
+            <a:ext cx="7862115" cy="237744"/>
           </a:xfrm>
           <a:prstGeom prst="rect">
             <a:avLst/>
@@ -11011,9 +11093,17 @@
           <a:bodyPr wrap="square" lIns="0" tIns="0" rIns="0" bIns="0" rtlCol="0" anchor="ctr"/>
           <a:lstStyle/>
           <a:p>
-            <a:pPr marL="0" indent="0">
-              <a:buNone/>
-            </a:pPr>
+            <a:r>
+              <a:rPr lang="sr-Cyrl-RS" sz="1000" dirty="0">
+                <a:solidFill>
+                  <a:srgbClr val="5B6B7F"/>
+                </a:solidFill>
+                <a:latin typeface="Calibri" pitchFamily="34" charset="0"/>
+                <a:ea typeface="Calibri" pitchFamily="34" charset="-122"/>
+                <a:cs typeface="Calibri" pitchFamily="34" charset="-120"/>
+              </a:rPr>
+              <a:t>Борис</a:t>
+            </a:r>
             <a:r>
               <a:rPr lang="en-US" sz="1000" dirty="0">
                 <a:solidFill>
@@ -11023,7 +11113,40 @@
                 <a:ea typeface="Calibri" pitchFamily="34" charset="-122"/>
                 <a:cs typeface="Calibri" pitchFamily="34" charset="-120"/>
               </a:rPr>
-              <a:t>Б. Летић  ·  Прекомерно одбијање код локалних језичких модела</a:t>
+              <a:t> </a:t>
+            </a:r>
+            <a:r>
+              <a:rPr lang="sr-Cyrl-RS" sz="1000" dirty="0">
+                <a:solidFill>
+                  <a:srgbClr val="5B6B7F"/>
+                </a:solidFill>
+                <a:latin typeface="Calibri" pitchFamily="34" charset="0"/>
+                <a:ea typeface="Calibri" pitchFamily="34" charset="-122"/>
+                <a:cs typeface="Calibri" pitchFamily="34" charset="-120"/>
+              </a:rPr>
+              <a:t>Летић</a:t>
+            </a:r>
+            <a:r>
+              <a:rPr lang="en-US" sz="1000" dirty="0">
+                <a:solidFill>
+                  <a:srgbClr val="5B6B7F"/>
+                </a:solidFill>
+                <a:latin typeface="Calibri" pitchFamily="34" charset="0"/>
+                <a:ea typeface="Calibri" pitchFamily="34" charset="-122"/>
+                <a:cs typeface="Calibri" pitchFamily="34" charset="-120"/>
+              </a:rPr>
+              <a:t>  ·  </a:t>
+            </a:r>
+            <a:r>
+              <a:rPr lang="sr-Cyrl-RS" sz="1000" dirty="0">
+                <a:solidFill>
+                  <a:srgbClr val="5B6B7F"/>
+                </a:solidFill>
+                <a:latin typeface="Calibri" pitchFamily="34" charset="0"/>
+                <a:ea typeface="Calibri" pitchFamily="34" charset="-122"/>
+                <a:cs typeface="Calibri" pitchFamily="34" charset="-120"/>
+              </a:rPr>
+              <a:t>Прекомерно одбијање и компромис између поравнања и корисности код ресурсно ограничених локалних језичких модела</a:t>
             </a:r>
             <a:endParaRPr lang="en-US" sz="1000" dirty="0"/>
           </a:p>
@@ -11345,7 +11468,7 @@
         </p:nvGraphicFramePr>
         <p:xfrm>
           <a:off x="4754880" y="1554480"/>
-          <a:ext cx="6903720" cy="914400"/>
+          <a:ext cx="6903720" cy="4498848"/>
         </p:xfrm>
         <a:graphic>
           <a:graphicData uri="http://schemas.openxmlformats.org/drawingml/2006/table">
@@ -12492,7 +12615,7 @@
         <p:spPr>
           <a:xfrm>
             <a:off x="548640" y="6419088"/>
-            <a:ext cx="7315200" cy="237744"/>
+            <a:ext cx="8193024" cy="237744"/>
           </a:xfrm>
           <a:prstGeom prst="rect">
             <a:avLst/>
@@ -12504,9 +12627,17 @@
           <a:bodyPr wrap="square" lIns="0" tIns="0" rIns="0" bIns="0" rtlCol="0" anchor="ctr"/>
           <a:lstStyle/>
           <a:p>
-            <a:pPr marL="0" indent="0">
-              <a:buNone/>
-            </a:pPr>
+            <a:r>
+              <a:rPr lang="sr-Cyrl-RS" sz="1000" dirty="0">
+                <a:solidFill>
+                  <a:srgbClr val="5B6B7F"/>
+                </a:solidFill>
+                <a:latin typeface="Calibri" pitchFamily="34" charset="0"/>
+                <a:ea typeface="Calibri" pitchFamily="34" charset="-122"/>
+                <a:cs typeface="Calibri" pitchFamily="34" charset="-120"/>
+              </a:rPr>
+              <a:t>Борис</a:t>
+            </a:r>
             <a:r>
               <a:rPr lang="en-US" sz="1000" dirty="0">
                 <a:solidFill>
@@ -12516,7 +12647,40 @@
                 <a:ea typeface="Calibri" pitchFamily="34" charset="-122"/>
                 <a:cs typeface="Calibri" pitchFamily="34" charset="-120"/>
               </a:rPr>
-              <a:t>Б. Летић  ·  Прекомерно одбијање код локалних језичких модела</a:t>
+              <a:t> </a:t>
+            </a:r>
+            <a:r>
+              <a:rPr lang="sr-Cyrl-RS" sz="1000" dirty="0">
+                <a:solidFill>
+                  <a:srgbClr val="5B6B7F"/>
+                </a:solidFill>
+                <a:latin typeface="Calibri" pitchFamily="34" charset="0"/>
+                <a:ea typeface="Calibri" pitchFamily="34" charset="-122"/>
+                <a:cs typeface="Calibri" pitchFamily="34" charset="-120"/>
+              </a:rPr>
+              <a:t>Летић</a:t>
+            </a:r>
+            <a:r>
+              <a:rPr lang="en-US" sz="1000" dirty="0">
+                <a:solidFill>
+                  <a:srgbClr val="5B6B7F"/>
+                </a:solidFill>
+                <a:latin typeface="Calibri" pitchFamily="34" charset="0"/>
+                <a:ea typeface="Calibri" pitchFamily="34" charset="-122"/>
+                <a:cs typeface="Calibri" pitchFamily="34" charset="-120"/>
+              </a:rPr>
+              <a:t>  ·  </a:t>
+            </a:r>
+            <a:r>
+              <a:rPr lang="sr-Cyrl-RS" sz="1000" dirty="0">
+                <a:solidFill>
+                  <a:srgbClr val="5B6B7F"/>
+                </a:solidFill>
+                <a:latin typeface="Calibri" pitchFamily="34" charset="0"/>
+                <a:ea typeface="Calibri" pitchFamily="34" charset="-122"/>
+                <a:cs typeface="Calibri" pitchFamily="34" charset="-120"/>
+              </a:rPr>
+              <a:t>Прекомерно одбијање и компромис између поравнања и корисности код ресурсно ограничених локалних језичких модела</a:t>
             </a:r>
             <a:endParaRPr lang="en-US" sz="1000" dirty="0"/>
           </a:p>
@@ -13813,8 +13977,8 @@
         </p:nvSpPr>
         <p:spPr>
           <a:xfrm>
-            <a:off x="548640" y="6419088"/>
-            <a:ext cx="7315200" cy="237744"/>
+            <a:off x="548639" y="6419088"/>
+            <a:ext cx="7663707" cy="237744"/>
           </a:xfrm>
           <a:prstGeom prst="rect">
             <a:avLst/>
@@ -13826,9 +13990,17 @@
           <a:bodyPr wrap="square" lIns="0" tIns="0" rIns="0" bIns="0" rtlCol="0" anchor="ctr"/>
           <a:lstStyle/>
           <a:p>
-            <a:pPr marL="0" indent="0">
-              <a:buNone/>
-            </a:pPr>
+            <a:r>
+              <a:rPr lang="sr-Cyrl-RS" sz="1000" dirty="0">
+                <a:solidFill>
+                  <a:srgbClr val="5B6B7F"/>
+                </a:solidFill>
+                <a:latin typeface="Calibri" pitchFamily="34" charset="0"/>
+                <a:ea typeface="Calibri" pitchFamily="34" charset="-122"/>
+                <a:cs typeface="Calibri" pitchFamily="34" charset="-120"/>
+              </a:rPr>
+              <a:t>Борис</a:t>
+            </a:r>
             <a:r>
               <a:rPr lang="en-US" sz="1000" dirty="0">
                 <a:solidFill>
@@ -13838,7 +14010,40 @@
                 <a:ea typeface="Calibri" pitchFamily="34" charset="-122"/>
                 <a:cs typeface="Calibri" pitchFamily="34" charset="-120"/>
               </a:rPr>
-              <a:t>Б. Летић  ·  Прекомерно одбијање код локалних језичких модела</a:t>
+              <a:t> </a:t>
+            </a:r>
+            <a:r>
+              <a:rPr lang="sr-Cyrl-RS" sz="1000" dirty="0">
+                <a:solidFill>
+                  <a:srgbClr val="5B6B7F"/>
+                </a:solidFill>
+                <a:latin typeface="Calibri" pitchFamily="34" charset="0"/>
+                <a:ea typeface="Calibri" pitchFamily="34" charset="-122"/>
+                <a:cs typeface="Calibri" pitchFamily="34" charset="-120"/>
+              </a:rPr>
+              <a:t>Летић</a:t>
+            </a:r>
+            <a:r>
+              <a:rPr lang="en-US" sz="1000" dirty="0">
+                <a:solidFill>
+                  <a:srgbClr val="5B6B7F"/>
+                </a:solidFill>
+                <a:latin typeface="Calibri" pitchFamily="34" charset="0"/>
+                <a:ea typeface="Calibri" pitchFamily="34" charset="-122"/>
+                <a:cs typeface="Calibri" pitchFamily="34" charset="-120"/>
+              </a:rPr>
+              <a:t>  ·  </a:t>
+            </a:r>
+            <a:r>
+              <a:rPr lang="sr-Cyrl-RS" sz="1000" dirty="0">
+                <a:solidFill>
+                  <a:srgbClr val="5B6B7F"/>
+                </a:solidFill>
+                <a:latin typeface="Calibri" pitchFamily="34" charset="0"/>
+                <a:ea typeface="Calibri" pitchFamily="34" charset="-122"/>
+                <a:cs typeface="Calibri" pitchFamily="34" charset="-120"/>
+              </a:rPr>
+              <a:t>Прекомерно одбијање и компромис између поравнања и корисности код ресурсно ограничених локалних језичких модела</a:t>
             </a:r>
             <a:endParaRPr lang="en-US" sz="1000" dirty="0"/>
           </a:p>
@@ -13899,7 +14104,7 @@
         </p:nvGraphicFramePr>
         <p:xfrm>
           <a:off x="548640" y="1554480"/>
-          <a:ext cx="6858000" cy="914400"/>
+          <a:ext cx="6858000" cy="3206496"/>
         </p:xfrm>
         <a:graphic>
           <a:graphicData uri="http://schemas.openxmlformats.org/drawingml/2006/table">
@@ -16264,7 +16469,7 @@
         <p:spPr>
           <a:xfrm>
             <a:off x="548640" y="6419088"/>
-            <a:ext cx="7315200" cy="237744"/>
+            <a:ext cx="7879368" cy="237744"/>
           </a:xfrm>
           <a:prstGeom prst="rect">
             <a:avLst/>
@@ -16276,9 +16481,17 @@
           <a:bodyPr wrap="square" lIns="0" tIns="0" rIns="0" bIns="0" rtlCol="0" anchor="ctr"/>
           <a:lstStyle/>
           <a:p>
-            <a:pPr marL="0" indent="0">
-              <a:buNone/>
-            </a:pPr>
+            <a:r>
+              <a:rPr lang="sr-Cyrl-RS" sz="1000" dirty="0">
+                <a:solidFill>
+                  <a:srgbClr val="5B6B7F"/>
+                </a:solidFill>
+                <a:latin typeface="Calibri" pitchFamily="34" charset="0"/>
+                <a:ea typeface="Calibri" pitchFamily="34" charset="-122"/>
+                <a:cs typeface="Calibri" pitchFamily="34" charset="-120"/>
+              </a:rPr>
+              <a:t>Борис</a:t>
+            </a:r>
             <a:r>
               <a:rPr lang="en-US" sz="1000" dirty="0">
                 <a:solidFill>
@@ -16288,7 +16501,40 @@
                 <a:ea typeface="Calibri" pitchFamily="34" charset="-122"/>
                 <a:cs typeface="Calibri" pitchFamily="34" charset="-120"/>
               </a:rPr>
-              <a:t>Б. Летић  ·  Прекомерно одбијање код локалних језичких модела</a:t>
+              <a:t> </a:t>
+            </a:r>
+            <a:r>
+              <a:rPr lang="sr-Cyrl-RS" sz="1000" dirty="0">
+                <a:solidFill>
+                  <a:srgbClr val="5B6B7F"/>
+                </a:solidFill>
+                <a:latin typeface="Calibri" pitchFamily="34" charset="0"/>
+                <a:ea typeface="Calibri" pitchFamily="34" charset="-122"/>
+                <a:cs typeface="Calibri" pitchFamily="34" charset="-120"/>
+              </a:rPr>
+              <a:t>Летић</a:t>
+            </a:r>
+            <a:r>
+              <a:rPr lang="en-US" sz="1000" dirty="0">
+                <a:solidFill>
+                  <a:srgbClr val="5B6B7F"/>
+                </a:solidFill>
+                <a:latin typeface="Calibri" pitchFamily="34" charset="0"/>
+                <a:ea typeface="Calibri" pitchFamily="34" charset="-122"/>
+                <a:cs typeface="Calibri" pitchFamily="34" charset="-120"/>
+              </a:rPr>
+              <a:t>  ·  </a:t>
+            </a:r>
+            <a:r>
+              <a:rPr lang="sr-Cyrl-RS" sz="1000" dirty="0">
+                <a:solidFill>
+                  <a:srgbClr val="5B6B7F"/>
+                </a:solidFill>
+                <a:latin typeface="Calibri" pitchFamily="34" charset="0"/>
+                <a:ea typeface="Calibri" pitchFamily="34" charset="-122"/>
+                <a:cs typeface="Calibri" pitchFamily="34" charset="-120"/>
+              </a:rPr>
+              <a:t>Прекомерно одбијање и компромис између поравнања и корисности код ресурсно ограничених локалних језичких модела</a:t>
             </a:r>
             <a:endParaRPr lang="en-US" sz="1000" dirty="0"/>
           </a:p>
@@ -17375,8 +17621,8 @@
         </p:nvSpPr>
         <p:spPr>
           <a:xfrm>
-            <a:off x="548640" y="6419088"/>
-            <a:ext cx="7315200" cy="237744"/>
+            <a:off x="548639" y="6419088"/>
+            <a:ext cx="7870741" cy="237744"/>
           </a:xfrm>
           <a:prstGeom prst="rect">
             <a:avLst/>
@@ -17388,9 +17634,17 @@
           <a:bodyPr wrap="square" lIns="0" tIns="0" rIns="0" bIns="0" rtlCol="0" anchor="ctr"/>
           <a:lstStyle/>
           <a:p>
-            <a:pPr marL="0" indent="0">
-              <a:buNone/>
-            </a:pPr>
+            <a:r>
+              <a:rPr lang="sr-Cyrl-RS" sz="1000" dirty="0">
+                <a:solidFill>
+                  <a:srgbClr val="5B6B7F"/>
+                </a:solidFill>
+                <a:latin typeface="Calibri" pitchFamily="34" charset="0"/>
+                <a:ea typeface="Calibri" pitchFamily="34" charset="-122"/>
+                <a:cs typeface="Calibri" pitchFamily="34" charset="-120"/>
+              </a:rPr>
+              <a:t>Борис</a:t>
+            </a:r>
             <a:r>
               <a:rPr lang="en-US" sz="1000" dirty="0">
                 <a:solidFill>
@@ -17400,7 +17654,40 @@
                 <a:ea typeface="Calibri" pitchFamily="34" charset="-122"/>
                 <a:cs typeface="Calibri" pitchFamily="34" charset="-120"/>
               </a:rPr>
-              <a:t>Б. Летић  ·  Прекомерно одбијање код локалних језичких модела</a:t>
+              <a:t> </a:t>
+            </a:r>
+            <a:r>
+              <a:rPr lang="sr-Cyrl-RS" sz="1000" dirty="0">
+                <a:solidFill>
+                  <a:srgbClr val="5B6B7F"/>
+                </a:solidFill>
+                <a:latin typeface="Calibri" pitchFamily="34" charset="0"/>
+                <a:ea typeface="Calibri" pitchFamily="34" charset="-122"/>
+                <a:cs typeface="Calibri" pitchFamily="34" charset="-120"/>
+              </a:rPr>
+              <a:t>Летић</a:t>
+            </a:r>
+            <a:r>
+              <a:rPr lang="en-US" sz="1000" dirty="0">
+                <a:solidFill>
+                  <a:srgbClr val="5B6B7F"/>
+                </a:solidFill>
+                <a:latin typeface="Calibri" pitchFamily="34" charset="0"/>
+                <a:ea typeface="Calibri" pitchFamily="34" charset="-122"/>
+                <a:cs typeface="Calibri" pitchFamily="34" charset="-120"/>
+              </a:rPr>
+              <a:t>  ·  </a:t>
+            </a:r>
+            <a:r>
+              <a:rPr lang="sr-Cyrl-RS" sz="1000" dirty="0">
+                <a:solidFill>
+                  <a:srgbClr val="5B6B7F"/>
+                </a:solidFill>
+                <a:latin typeface="Calibri" pitchFamily="34" charset="0"/>
+                <a:ea typeface="Calibri" pitchFamily="34" charset="-122"/>
+                <a:cs typeface="Calibri" pitchFamily="34" charset="-120"/>
+              </a:rPr>
+              <a:t>Прекомерно одбијање и компромис између поравнања и корисности код ресурсно ограничених локалних језичких модела</a:t>
             </a:r>
             <a:endParaRPr lang="en-US" sz="1000" dirty="0"/>
           </a:p>
@@ -18398,7 +18685,7 @@
         <p:spPr>
           <a:xfrm>
             <a:off x="548640" y="6419088"/>
-            <a:ext cx="7315200" cy="237744"/>
+            <a:ext cx="7896620" cy="237744"/>
           </a:xfrm>
           <a:prstGeom prst="rect">
             <a:avLst/>
@@ -18410,9 +18697,17 @@
           <a:bodyPr wrap="square" lIns="0" tIns="0" rIns="0" bIns="0" rtlCol="0" anchor="ctr"/>
           <a:lstStyle/>
           <a:p>
-            <a:pPr marL="0" indent="0">
-              <a:buNone/>
-            </a:pPr>
+            <a:r>
+              <a:rPr lang="sr-Cyrl-RS" sz="1000" dirty="0">
+                <a:solidFill>
+                  <a:srgbClr val="5B6B7F"/>
+                </a:solidFill>
+                <a:latin typeface="Calibri" pitchFamily="34" charset="0"/>
+                <a:ea typeface="Calibri" pitchFamily="34" charset="-122"/>
+                <a:cs typeface="Calibri" pitchFamily="34" charset="-120"/>
+              </a:rPr>
+              <a:t>Борис</a:t>
+            </a:r>
             <a:r>
               <a:rPr lang="en-US" sz="1000" dirty="0">
                 <a:solidFill>
@@ -18422,7 +18717,40 @@
                 <a:ea typeface="Calibri" pitchFamily="34" charset="-122"/>
                 <a:cs typeface="Calibri" pitchFamily="34" charset="-120"/>
               </a:rPr>
-              <a:t>Б. Летић  ·  Прекомерно одбијање код локалних језичких модела</a:t>
+              <a:t> </a:t>
+            </a:r>
+            <a:r>
+              <a:rPr lang="sr-Cyrl-RS" sz="1000" dirty="0">
+                <a:solidFill>
+                  <a:srgbClr val="5B6B7F"/>
+                </a:solidFill>
+                <a:latin typeface="Calibri" pitchFamily="34" charset="0"/>
+                <a:ea typeface="Calibri" pitchFamily="34" charset="-122"/>
+                <a:cs typeface="Calibri" pitchFamily="34" charset="-120"/>
+              </a:rPr>
+              <a:t>Летић</a:t>
+            </a:r>
+            <a:r>
+              <a:rPr lang="en-US" sz="1000" dirty="0">
+                <a:solidFill>
+                  <a:srgbClr val="5B6B7F"/>
+                </a:solidFill>
+                <a:latin typeface="Calibri" pitchFamily="34" charset="0"/>
+                <a:ea typeface="Calibri" pitchFamily="34" charset="-122"/>
+                <a:cs typeface="Calibri" pitchFamily="34" charset="-120"/>
+              </a:rPr>
+              <a:t>  ·  </a:t>
+            </a:r>
+            <a:r>
+              <a:rPr lang="sr-Cyrl-RS" sz="1000" dirty="0">
+                <a:solidFill>
+                  <a:srgbClr val="5B6B7F"/>
+                </a:solidFill>
+                <a:latin typeface="Calibri" pitchFamily="34" charset="0"/>
+                <a:ea typeface="Calibri" pitchFamily="34" charset="-122"/>
+                <a:cs typeface="Calibri" pitchFamily="34" charset="-120"/>
+              </a:rPr>
+              <a:t>Прекомерно одбијање и компромис између поравнања и корисности код ресурсно ограничених локалних језичких модела</a:t>
             </a:r>
             <a:endParaRPr lang="en-US" sz="1000" dirty="0"/>
           </a:p>
@@ -18483,7 +18811,7 @@
         </p:nvGraphicFramePr>
         <p:xfrm>
           <a:off x="548640" y="1554480"/>
-          <a:ext cx="11109960" cy="914400"/>
+          <a:ext cx="11109960" cy="3419856"/>
         </p:xfrm>
         <a:graphic>
           <a:graphicData uri="http://schemas.openxmlformats.org/drawingml/2006/table">
@@ -23099,7 +23427,7 @@
         <p:spPr>
           <a:xfrm>
             <a:off x="548640" y="6419088"/>
-            <a:ext cx="7315200" cy="237744"/>
+            <a:ext cx="7781544" cy="237744"/>
           </a:xfrm>
           <a:prstGeom prst="rect">
             <a:avLst/>
@@ -23111,9 +23439,17 @@
           <a:bodyPr wrap="square" lIns="0" tIns="0" rIns="0" bIns="0" rtlCol="0" anchor="ctr"/>
           <a:lstStyle/>
           <a:p>
-            <a:pPr marL="0" indent="0">
-              <a:buNone/>
-            </a:pPr>
+            <a:r>
+              <a:rPr lang="sr-Cyrl-RS" sz="1000" dirty="0">
+                <a:solidFill>
+                  <a:srgbClr val="5B6B7F"/>
+                </a:solidFill>
+                <a:latin typeface="Calibri" pitchFamily="34" charset="0"/>
+                <a:ea typeface="Calibri" pitchFamily="34" charset="-122"/>
+                <a:cs typeface="Calibri" pitchFamily="34" charset="-120"/>
+              </a:rPr>
+              <a:t>Борис</a:t>
+            </a:r>
             <a:r>
               <a:rPr lang="en-US" sz="1000" dirty="0">
                 <a:solidFill>
@@ -23123,7 +23459,40 @@
                 <a:ea typeface="Calibri" pitchFamily="34" charset="-122"/>
                 <a:cs typeface="Calibri" pitchFamily="34" charset="-120"/>
               </a:rPr>
-              <a:t>Б. Летић  ·  Прекомерно одбијање код локалних језичких модела</a:t>
+              <a:t> </a:t>
+            </a:r>
+            <a:r>
+              <a:rPr lang="sr-Cyrl-RS" sz="1000" dirty="0">
+                <a:solidFill>
+                  <a:srgbClr val="5B6B7F"/>
+                </a:solidFill>
+                <a:latin typeface="Calibri" pitchFamily="34" charset="0"/>
+                <a:ea typeface="Calibri" pitchFamily="34" charset="-122"/>
+                <a:cs typeface="Calibri" pitchFamily="34" charset="-120"/>
+              </a:rPr>
+              <a:t>Летић</a:t>
+            </a:r>
+            <a:r>
+              <a:rPr lang="en-US" sz="1000" dirty="0">
+                <a:solidFill>
+                  <a:srgbClr val="5B6B7F"/>
+                </a:solidFill>
+                <a:latin typeface="Calibri" pitchFamily="34" charset="0"/>
+                <a:ea typeface="Calibri" pitchFamily="34" charset="-122"/>
+                <a:cs typeface="Calibri" pitchFamily="34" charset="-120"/>
+              </a:rPr>
+              <a:t>  ·  </a:t>
+            </a:r>
+            <a:r>
+              <a:rPr lang="sr-Cyrl-RS" sz="1000" dirty="0">
+                <a:solidFill>
+                  <a:srgbClr val="5B6B7F"/>
+                </a:solidFill>
+                <a:latin typeface="Calibri" pitchFamily="34" charset="0"/>
+                <a:ea typeface="Calibri" pitchFamily="34" charset="-122"/>
+                <a:cs typeface="Calibri" pitchFamily="34" charset="-120"/>
+              </a:rPr>
+              <a:t>Прекомерно одбијање и компромис између поравнања и корисности код ресурсно ограничених локалних језичких модела</a:t>
             </a:r>
             <a:endParaRPr lang="en-US" sz="1000" dirty="0"/>
           </a:p>
@@ -25534,7 +25903,7 @@
         <p:spPr>
           <a:xfrm>
             <a:off x="548640" y="6419088"/>
-            <a:ext cx="7315200" cy="237744"/>
+            <a:ext cx="7689586" cy="237744"/>
           </a:xfrm>
           <a:prstGeom prst="rect">
             <a:avLst/>
@@ -25546,9 +25915,17 @@
           <a:bodyPr wrap="square" lIns="0" tIns="0" rIns="0" bIns="0" rtlCol="0" anchor="ctr"/>
           <a:lstStyle/>
           <a:p>
-            <a:pPr marL="0" indent="0">
-              <a:buNone/>
-            </a:pPr>
+            <a:r>
+              <a:rPr lang="sr-Cyrl-RS" sz="1000" dirty="0">
+                <a:solidFill>
+                  <a:srgbClr val="5B6B7F"/>
+                </a:solidFill>
+                <a:latin typeface="Calibri" pitchFamily="34" charset="0"/>
+                <a:ea typeface="Calibri" pitchFamily="34" charset="-122"/>
+                <a:cs typeface="Calibri" pitchFamily="34" charset="-120"/>
+              </a:rPr>
+              <a:t>Борис</a:t>
+            </a:r>
             <a:r>
               <a:rPr lang="en-US" sz="1000" dirty="0">
                 <a:solidFill>
@@ -25558,7 +25935,40 @@
                 <a:ea typeface="Calibri" pitchFamily="34" charset="-122"/>
                 <a:cs typeface="Calibri" pitchFamily="34" charset="-120"/>
               </a:rPr>
-              <a:t>Б. Летић  ·  Прекомерно одбијање код локалних језичких модела</a:t>
+              <a:t> </a:t>
+            </a:r>
+            <a:r>
+              <a:rPr lang="sr-Cyrl-RS" sz="1000" dirty="0">
+                <a:solidFill>
+                  <a:srgbClr val="5B6B7F"/>
+                </a:solidFill>
+                <a:latin typeface="Calibri" pitchFamily="34" charset="0"/>
+                <a:ea typeface="Calibri" pitchFamily="34" charset="-122"/>
+                <a:cs typeface="Calibri" pitchFamily="34" charset="-120"/>
+              </a:rPr>
+              <a:t>Летић</a:t>
+            </a:r>
+            <a:r>
+              <a:rPr lang="en-US" sz="1000" dirty="0">
+                <a:solidFill>
+                  <a:srgbClr val="5B6B7F"/>
+                </a:solidFill>
+                <a:latin typeface="Calibri" pitchFamily="34" charset="0"/>
+                <a:ea typeface="Calibri" pitchFamily="34" charset="-122"/>
+                <a:cs typeface="Calibri" pitchFamily="34" charset="-120"/>
+              </a:rPr>
+              <a:t>  ·  </a:t>
+            </a:r>
+            <a:r>
+              <a:rPr lang="sr-Cyrl-RS" sz="1000" dirty="0">
+                <a:solidFill>
+                  <a:srgbClr val="5B6B7F"/>
+                </a:solidFill>
+                <a:latin typeface="Calibri" pitchFamily="34" charset="0"/>
+                <a:ea typeface="Calibri" pitchFamily="34" charset="-122"/>
+                <a:cs typeface="Calibri" pitchFamily="34" charset="-120"/>
+              </a:rPr>
+              <a:t>Прекомерно одбијање и компромис између поравнања и корисности код ресурсно ограничених локалних језичких модела</a:t>
             </a:r>
             <a:endParaRPr lang="en-US" sz="1000" dirty="0"/>
           </a:p>
@@ -26106,7 +26516,7 @@
         <p:spPr>
           <a:xfrm>
             <a:off x="548640" y="6419088"/>
-            <a:ext cx="7315200" cy="237744"/>
+            <a:ext cx="7589520" cy="237744"/>
           </a:xfrm>
           <a:prstGeom prst="rect">
             <a:avLst/>
@@ -26122,6 +26532,17 @@
               <a:buNone/>
             </a:pPr>
             <a:r>
+              <a:rPr lang="sr-Cyrl-RS" sz="1000" dirty="0">
+                <a:solidFill>
+                  <a:srgbClr val="5B6B7F"/>
+                </a:solidFill>
+                <a:latin typeface="Calibri" pitchFamily="34" charset="0"/>
+                <a:ea typeface="Calibri" pitchFamily="34" charset="-122"/>
+                <a:cs typeface="Calibri" pitchFamily="34" charset="-120"/>
+              </a:rPr>
+              <a:t>Борис</a:t>
+            </a:r>
+            <a:r>
               <a:rPr lang="en-US" sz="1000" dirty="0">
                 <a:solidFill>
                   <a:srgbClr val="5B6B7F"/>
@@ -26130,7 +26551,40 @@
                 <a:ea typeface="Calibri" pitchFamily="34" charset="-122"/>
                 <a:cs typeface="Calibri" pitchFamily="34" charset="-120"/>
               </a:rPr>
-              <a:t>Б. Летић  ·  Прекомерно одбијање код локалних језичких модела</a:t>
+              <a:t> </a:t>
+            </a:r>
+            <a:r>
+              <a:rPr lang="sr-Cyrl-RS" sz="1000" dirty="0">
+                <a:solidFill>
+                  <a:srgbClr val="5B6B7F"/>
+                </a:solidFill>
+                <a:latin typeface="Calibri" pitchFamily="34" charset="0"/>
+                <a:ea typeface="Calibri" pitchFamily="34" charset="-122"/>
+                <a:cs typeface="Calibri" pitchFamily="34" charset="-120"/>
+              </a:rPr>
+              <a:t>Летић</a:t>
+            </a:r>
+            <a:r>
+              <a:rPr lang="en-US" sz="1000" dirty="0">
+                <a:solidFill>
+                  <a:srgbClr val="5B6B7F"/>
+                </a:solidFill>
+                <a:latin typeface="Calibri" pitchFamily="34" charset="0"/>
+                <a:ea typeface="Calibri" pitchFamily="34" charset="-122"/>
+                <a:cs typeface="Calibri" pitchFamily="34" charset="-120"/>
+              </a:rPr>
+              <a:t>  ·  </a:t>
+            </a:r>
+            <a:r>
+              <a:rPr lang="sr-Cyrl-RS" sz="1000" dirty="0">
+                <a:solidFill>
+                  <a:srgbClr val="5B6B7F"/>
+                </a:solidFill>
+                <a:latin typeface="Calibri" pitchFamily="34" charset="0"/>
+                <a:ea typeface="Calibri" pitchFamily="34" charset="-122"/>
+                <a:cs typeface="Calibri" pitchFamily="34" charset="-120"/>
+              </a:rPr>
+              <a:t>Прекомерно одбијање и компромис између поравнања и корисности код ресурсно ограничених локалних језичких модела</a:t>
             </a:r>
             <a:endParaRPr lang="en-US" sz="1000" dirty="0"/>
           </a:p>
@@ -27477,7 +27931,7 @@
         <p:spPr>
           <a:xfrm>
             <a:off x="548640" y="6419088"/>
-            <a:ext cx="7315200" cy="237744"/>
+            <a:ext cx="7715466" cy="237744"/>
           </a:xfrm>
           <a:prstGeom prst="rect">
             <a:avLst/>
@@ -27489,9 +27943,17 @@
           <a:bodyPr wrap="square" lIns="0" tIns="0" rIns="0" bIns="0" rtlCol="0" anchor="ctr"/>
           <a:lstStyle/>
           <a:p>
-            <a:pPr marL="0" indent="0">
-              <a:buNone/>
-            </a:pPr>
+            <a:r>
+              <a:rPr lang="sr-Cyrl-RS" sz="1000" dirty="0">
+                <a:solidFill>
+                  <a:srgbClr val="5B6B7F"/>
+                </a:solidFill>
+                <a:latin typeface="Calibri" pitchFamily="34" charset="0"/>
+                <a:ea typeface="Calibri" pitchFamily="34" charset="-122"/>
+                <a:cs typeface="Calibri" pitchFamily="34" charset="-120"/>
+              </a:rPr>
+              <a:t>Борис</a:t>
+            </a:r>
             <a:r>
               <a:rPr lang="en-US" sz="1000" dirty="0">
                 <a:solidFill>
@@ -27501,7 +27963,40 @@
                 <a:ea typeface="Calibri" pitchFamily="34" charset="-122"/>
                 <a:cs typeface="Calibri" pitchFamily="34" charset="-120"/>
               </a:rPr>
-              <a:t>Б. Летић  ·  Прекомерно одбијање код локалних језичких модела</a:t>
+              <a:t> </a:t>
+            </a:r>
+            <a:r>
+              <a:rPr lang="sr-Cyrl-RS" sz="1000" dirty="0">
+                <a:solidFill>
+                  <a:srgbClr val="5B6B7F"/>
+                </a:solidFill>
+                <a:latin typeface="Calibri" pitchFamily="34" charset="0"/>
+                <a:ea typeface="Calibri" pitchFamily="34" charset="-122"/>
+                <a:cs typeface="Calibri" pitchFamily="34" charset="-120"/>
+              </a:rPr>
+              <a:t>Летић</a:t>
+            </a:r>
+            <a:r>
+              <a:rPr lang="en-US" sz="1000" dirty="0">
+                <a:solidFill>
+                  <a:srgbClr val="5B6B7F"/>
+                </a:solidFill>
+                <a:latin typeface="Calibri" pitchFamily="34" charset="0"/>
+                <a:ea typeface="Calibri" pitchFamily="34" charset="-122"/>
+                <a:cs typeface="Calibri" pitchFamily="34" charset="-120"/>
+              </a:rPr>
+              <a:t>  ·  </a:t>
+            </a:r>
+            <a:r>
+              <a:rPr lang="sr-Cyrl-RS" sz="1000" dirty="0">
+                <a:solidFill>
+                  <a:srgbClr val="5B6B7F"/>
+                </a:solidFill>
+                <a:latin typeface="Calibri" pitchFamily="34" charset="0"/>
+                <a:ea typeface="Calibri" pitchFamily="34" charset="-122"/>
+                <a:cs typeface="Calibri" pitchFamily="34" charset="-120"/>
+              </a:rPr>
+              <a:t>Прекомерно одбијање и компромис између поравнања и корисности код ресурсно ограничених локалних језичких модела</a:t>
             </a:r>
             <a:endParaRPr lang="en-US" sz="1000" dirty="0"/>
           </a:p>
@@ -27935,7 +28430,7 @@
         <p:spPr>
           <a:xfrm>
             <a:off x="548640" y="6419088"/>
-            <a:ext cx="7315200" cy="237744"/>
+            <a:ext cx="7801730" cy="237744"/>
           </a:xfrm>
           <a:prstGeom prst="rect">
             <a:avLst/>
@@ -27947,9 +28442,17 @@
           <a:bodyPr wrap="square" lIns="0" tIns="0" rIns="0" bIns="0" rtlCol="0" anchor="ctr"/>
           <a:lstStyle/>
           <a:p>
-            <a:pPr marL="0" indent="0">
-              <a:buNone/>
-            </a:pPr>
+            <a:r>
+              <a:rPr lang="sr-Cyrl-RS" sz="1000" dirty="0">
+                <a:solidFill>
+                  <a:srgbClr val="5B6B7F"/>
+                </a:solidFill>
+                <a:latin typeface="Calibri" pitchFamily="34" charset="0"/>
+                <a:ea typeface="Calibri" pitchFamily="34" charset="-122"/>
+                <a:cs typeface="Calibri" pitchFamily="34" charset="-120"/>
+              </a:rPr>
+              <a:t>Борис</a:t>
+            </a:r>
             <a:r>
               <a:rPr lang="en-US" sz="1000" dirty="0">
                 <a:solidFill>
@@ -27959,7 +28462,40 @@
                 <a:ea typeface="Calibri" pitchFamily="34" charset="-122"/>
                 <a:cs typeface="Calibri" pitchFamily="34" charset="-120"/>
               </a:rPr>
-              <a:t>Б. Летић  ·  Прекомерно одбијање код локалних језичких модела</a:t>
+              <a:t> </a:t>
+            </a:r>
+            <a:r>
+              <a:rPr lang="sr-Cyrl-RS" sz="1000" dirty="0">
+                <a:solidFill>
+                  <a:srgbClr val="5B6B7F"/>
+                </a:solidFill>
+                <a:latin typeface="Calibri" pitchFamily="34" charset="0"/>
+                <a:ea typeface="Calibri" pitchFamily="34" charset="-122"/>
+                <a:cs typeface="Calibri" pitchFamily="34" charset="-120"/>
+              </a:rPr>
+              <a:t>Летић</a:t>
+            </a:r>
+            <a:r>
+              <a:rPr lang="en-US" sz="1000" dirty="0">
+                <a:solidFill>
+                  <a:srgbClr val="5B6B7F"/>
+                </a:solidFill>
+                <a:latin typeface="Calibri" pitchFamily="34" charset="0"/>
+                <a:ea typeface="Calibri" pitchFamily="34" charset="-122"/>
+                <a:cs typeface="Calibri" pitchFamily="34" charset="-120"/>
+              </a:rPr>
+              <a:t>  ·  </a:t>
+            </a:r>
+            <a:r>
+              <a:rPr lang="sr-Cyrl-RS" sz="1000" dirty="0">
+                <a:solidFill>
+                  <a:srgbClr val="5B6B7F"/>
+                </a:solidFill>
+                <a:latin typeface="Calibri" pitchFamily="34" charset="0"/>
+                <a:ea typeface="Calibri" pitchFamily="34" charset="-122"/>
+                <a:cs typeface="Calibri" pitchFamily="34" charset="-120"/>
+              </a:rPr>
+              <a:t>Прекомерно одбијање и компромис између поравнања и корисности код ресурсно ограничених локалних језичких модела</a:t>
             </a:r>
             <a:endParaRPr lang="en-US" sz="1000" dirty="0"/>
           </a:p>
@@ -28036,7 +28572,7 @@
         </p:nvGraphicFramePr>
         <p:xfrm>
           <a:off x="548640" y="4709160"/>
-          <a:ext cx="5943600" cy="914400"/>
+          <a:ext cx="5943600" cy="1389888"/>
         </p:xfrm>
         <a:graphic>
           <a:graphicData uri="http://schemas.openxmlformats.org/drawingml/2006/table">
@@ -29574,8 +30110,8 @@
         </p:nvSpPr>
         <p:spPr>
           <a:xfrm>
-            <a:off x="548640" y="6419088"/>
-            <a:ext cx="7315200" cy="237744"/>
+            <a:off x="548639" y="6419088"/>
+            <a:ext cx="8043269" cy="237744"/>
           </a:xfrm>
           <a:prstGeom prst="rect">
             <a:avLst/>
@@ -29587,9 +30123,17 @@
           <a:bodyPr wrap="square" lIns="0" tIns="0" rIns="0" bIns="0" rtlCol="0" anchor="ctr"/>
           <a:lstStyle/>
           <a:p>
-            <a:pPr marL="0" indent="0">
-              <a:buNone/>
-            </a:pPr>
+            <a:r>
+              <a:rPr lang="sr-Cyrl-RS" sz="1000" dirty="0">
+                <a:solidFill>
+                  <a:srgbClr val="5B6B7F"/>
+                </a:solidFill>
+                <a:latin typeface="Calibri" pitchFamily="34" charset="0"/>
+                <a:ea typeface="Calibri" pitchFamily="34" charset="-122"/>
+                <a:cs typeface="Calibri" pitchFamily="34" charset="-120"/>
+              </a:rPr>
+              <a:t>Борис</a:t>
+            </a:r>
             <a:r>
               <a:rPr lang="en-US" sz="1000" dirty="0">
                 <a:solidFill>
@@ -29599,7 +30143,40 @@
                 <a:ea typeface="Calibri" pitchFamily="34" charset="-122"/>
                 <a:cs typeface="Calibri" pitchFamily="34" charset="-120"/>
               </a:rPr>
-              <a:t>Б. Летић  ·  Прекомерно одбијање код локалних језичких модела</a:t>
+              <a:t> </a:t>
+            </a:r>
+            <a:r>
+              <a:rPr lang="sr-Cyrl-RS" sz="1000" dirty="0">
+                <a:solidFill>
+                  <a:srgbClr val="5B6B7F"/>
+                </a:solidFill>
+                <a:latin typeface="Calibri" pitchFamily="34" charset="0"/>
+                <a:ea typeface="Calibri" pitchFamily="34" charset="-122"/>
+                <a:cs typeface="Calibri" pitchFamily="34" charset="-120"/>
+              </a:rPr>
+              <a:t>Летић</a:t>
+            </a:r>
+            <a:r>
+              <a:rPr lang="en-US" sz="1000" dirty="0">
+                <a:solidFill>
+                  <a:srgbClr val="5B6B7F"/>
+                </a:solidFill>
+                <a:latin typeface="Calibri" pitchFamily="34" charset="0"/>
+                <a:ea typeface="Calibri" pitchFamily="34" charset="-122"/>
+                <a:cs typeface="Calibri" pitchFamily="34" charset="-120"/>
+              </a:rPr>
+              <a:t>  ·  </a:t>
+            </a:r>
+            <a:r>
+              <a:rPr lang="sr-Cyrl-RS" sz="1000" dirty="0">
+                <a:solidFill>
+                  <a:srgbClr val="5B6B7F"/>
+                </a:solidFill>
+                <a:latin typeface="Calibri" pitchFamily="34" charset="0"/>
+                <a:ea typeface="Calibri" pitchFamily="34" charset="-122"/>
+                <a:cs typeface="Calibri" pitchFamily="34" charset="-120"/>
+              </a:rPr>
+              <a:t>Прекомерно одбијање и компромис између поравнања и корисности код ресурсно ограничених локалних језичких модела</a:t>
             </a:r>
             <a:endParaRPr lang="en-US" sz="1000" dirty="0"/>
           </a:p>
@@ -30129,7 +30706,7 @@
         <p:spPr>
           <a:xfrm>
             <a:off x="548640" y="6419088"/>
-            <a:ext cx="7315200" cy="237744"/>
+            <a:ext cx="7909560" cy="237744"/>
           </a:xfrm>
           <a:prstGeom prst="rect">
             <a:avLst/>
@@ -30141,9 +30718,17 @@
           <a:bodyPr wrap="square" lIns="0" tIns="0" rIns="0" bIns="0" rtlCol="0" anchor="ctr"/>
           <a:lstStyle/>
           <a:p>
-            <a:pPr marL="0" indent="0">
-              <a:buNone/>
-            </a:pPr>
+            <a:r>
+              <a:rPr lang="sr-Cyrl-RS" sz="1000" dirty="0">
+                <a:solidFill>
+                  <a:srgbClr val="5B6B7F"/>
+                </a:solidFill>
+                <a:latin typeface="Calibri" pitchFamily="34" charset="0"/>
+                <a:ea typeface="Calibri" pitchFamily="34" charset="-122"/>
+                <a:cs typeface="Calibri" pitchFamily="34" charset="-120"/>
+              </a:rPr>
+              <a:t>Борис</a:t>
+            </a:r>
             <a:r>
               <a:rPr lang="en-US" sz="1000" dirty="0">
                 <a:solidFill>
@@ -30153,7 +30738,40 @@
                 <a:ea typeface="Calibri" pitchFamily="34" charset="-122"/>
                 <a:cs typeface="Calibri" pitchFamily="34" charset="-120"/>
               </a:rPr>
-              <a:t>Б. Летић  ·  Прекомерно одбијање код локалних језичких модела</a:t>
+              <a:t> </a:t>
+            </a:r>
+            <a:r>
+              <a:rPr lang="sr-Cyrl-RS" sz="1000" dirty="0">
+                <a:solidFill>
+                  <a:srgbClr val="5B6B7F"/>
+                </a:solidFill>
+                <a:latin typeface="Calibri" pitchFamily="34" charset="0"/>
+                <a:ea typeface="Calibri" pitchFamily="34" charset="-122"/>
+                <a:cs typeface="Calibri" pitchFamily="34" charset="-120"/>
+              </a:rPr>
+              <a:t>Летић</a:t>
+            </a:r>
+            <a:r>
+              <a:rPr lang="en-US" sz="1000" dirty="0">
+                <a:solidFill>
+                  <a:srgbClr val="5B6B7F"/>
+                </a:solidFill>
+                <a:latin typeface="Calibri" pitchFamily="34" charset="0"/>
+                <a:ea typeface="Calibri" pitchFamily="34" charset="-122"/>
+                <a:cs typeface="Calibri" pitchFamily="34" charset="-120"/>
+              </a:rPr>
+              <a:t>  ·  </a:t>
+            </a:r>
+            <a:r>
+              <a:rPr lang="sr-Cyrl-RS" sz="1000" dirty="0">
+                <a:solidFill>
+                  <a:srgbClr val="5B6B7F"/>
+                </a:solidFill>
+                <a:latin typeface="Calibri" pitchFamily="34" charset="0"/>
+                <a:ea typeface="Calibri" pitchFamily="34" charset="-122"/>
+                <a:cs typeface="Calibri" pitchFamily="34" charset="-120"/>
+              </a:rPr>
+              <a:t>Прекомерно одбијање и компромис између поравнања и корисности код ресурсно ограничених локалних језичких модела</a:t>
             </a:r>
             <a:endParaRPr lang="en-US" sz="1000" dirty="0"/>
           </a:p>
@@ -33173,7 +33791,7 @@
         <p:spPr>
           <a:xfrm>
             <a:off x="548640" y="6419088"/>
-            <a:ext cx="7315200" cy="237744"/>
+            <a:ext cx="7965632" cy="237744"/>
           </a:xfrm>
           <a:prstGeom prst="rect">
             <a:avLst/>
@@ -33185,9 +33803,17 @@
           <a:bodyPr wrap="square" lIns="0" tIns="0" rIns="0" bIns="0" rtlCol="0" anchor="ctr"/>
           <a:lstStyle/>
           <a:p>
-            <a:pPr marL="0" indent="0">
-              <a:buNone/>
-            </a:pPr>
+            <a:r>
+              <a:rPr lang="sr-Cyrl-RS" sz="1000" dirty="0">
+                <a:solidFill>
+                  <a:srgbClr val="5B6B7F"/>
+                </a:solidFill>
+                <a:latin typeface="Calibri" pitchFamily="34" charset="0"/>
+                <a:ea typeface="Calibri" pitchFamily="34" charset="-122"/>
+                <a:cs typeface="Calibri" pitchFamily="34" charset="-120"/>
+              </a:rPr>
+              <a:t>Борис</a:t>
+            </a:r>
             <a:r>
               <a:rPr lang="en-US" sz="1000" dirty="0">
                 <a:solidFill>
@@ -33197,7 +33823,40 @@
                 <a:ea typeface="Calibri" pitchFamily="34" charset="-122"/>
                 <a:cs typeface="Calibri" pitchFamily="34" charset="-120"/>
               </a:rPr>
-              <a:t>Б. Летић  ·  Прекомерно одбијање код локалних језичких модела</a:t>
+              <a:t> </a:t>
+            </a:r>
+            <a:r>
+              <a:rPr lang="sr-Cyrl-RS" sz="1000" dirty="0">
+                <a:solidFill>
+                  <a:srgbClr val="5B6B7F"/>
+                </a:solidFill>
+                <a:latin typeface="Calibri" pitchFamily="34" charset="0"/>
+                <a:ea typeface="Calibri" pitchFamily="34" charset="-122"/>
+                <a:cs typeface="Calibri" pitchFamily="34" charset="-120"/>
+              </a:rPr>
+              <a:t>Летић</a:t>
+            </a:r>
+            <a:r>
+              <a:rPr lang="en-US" sz="1000" dirty="0">
+                <a:solidFill>
+                  <a:srgbClr val="5B6B7F"/>
+                </a:solidFill>
+                <a:latin typeface="Calibri" pitchFamily="34" charset="0"/>
+                <a:ea typeface="Calibri" pitchFamily="34" charset="-122"/>
+                <a:cs typeface="Calibri" pitchFamily="34" charset="-120"/>
+              </a:rPr>
+              <a:t>  ·  </a:t>
+            </a:r>
+            <a:r>
+              <a:rPr lang="sr-Cyrl-RS" sz="1000" dirty="0">
+                <a:solidFill>
+                  <a:srgbClr val="5B6B7F"/>
+                </a:solidFill>
+                <a:latin typeface="Calibri" pitchFamily="34" charset="0"/>
+                <a:ea typeface="Calibri" pitchFamily="34" charset="-122"/>
+                <a:cs typeface="Calibri" pitchFamily="34" charset="-120"/>
+              </a:rPr>
+              <a:t>Прекомерно одбијање и компромис између поравнања и корисности код ресурсно ограничених локалних језичких модела</a:t>
             </a:r>
             <a:endParaRPr lang="en-US" sz="1000" dirty="0"/>
           </a:p>
@@ -34716,8 +35375,8 @@
         </p:nvSpPr>
         <p:spPr>
           <a:xfrm>
-            <a:off x="548640" y="6419088"/>
-            <a:ext cx="7315200" cy="237744"/>
+            <a:off x="548639" y="6419088"/>
+            <a:ext cx="7862115" cy="237744"/>
           </a:xfrm>
           <a:prstGeom prst="rect">
             <a:avLst/>
@@ -34729,9 +35388,17 @@
           <a:bodyPr wrap="square" lIns="0" tIns="0" rIns="0" bIns="0" rtlCol="0" anchor="ctr"/>
           <a:lstStyle/>
           <a:p>
-            <a:pPr marL="0" indent="0">
-              <a:buNone/>
-            </a:pPr>
+            <a:r>
+              <a:rPr lang="sr-Cyrl-RS" sz="1000" dirty="0">
+                <a:solidFill>
+                  <a:srgbClr val="5B6B7F"/>
+                </a:solidFill>
+                <a:latin typeface="Calibri" pitchFamily="34" charset="0"/>
+                <a:ea typeface="Calibri" pitchFamily="34" charset="-122"/>
+                <a:cs typeface="Calibri" pitchFamily="34" charset="-120"/>
+              </a:rPr>
+              <a:t>Борис</a:t>
+            </a:r>
             <a:r>
               <a:rPr lang="en-US" sz="1000" dirty="0">
                 <a:solidFill>
@@ -34741,7 +35408,40 @@
                 <a:ea typeface="Calibri" pitchFamily="34" charset="-122"/>
                 <a:cs typeface="Calibri" pitchFamily="34" charset="-120"/>
               </a:rPr>
-              <a:t>Б. Летић  ·  Прекомерно одбијање код локалних језичких модела</a:t>
+              <a:t> </a:t>
+            </a:r>
+            <a:r>
+              <a:rPr lang="sr-Cyrl-RS" sz="1000" dirty="0">
+                <a:solidFill>
+                  <a:srgbClr val="5B6B7F"/>
+                </a:solidFill>
+                <a:latin typeface="Calibri" pitchFamily="34" charset="0"/>
+                <a:ea typeface="Calibri" pitchFamily="34" charset="-122"/>
+                <a:cs typeface="Calibri" pitchFamily="34" charset="-120"/>
+              </a:rPr>
+              <a:t>Летић</a:t>
+            </a:r>
+            <a:r>
+              <a:rPr lang="en-US" sz="1000" dirty="0">
+                <a:solidFill>
+                  <a:srgbClr val="5B6B7F"/>
+                </a:solidFill>
+                <a:latin typeface="Calibri" pitchFamily="34" charset="0"/>
+                <a:ea typeface="Calibri" pitchFamily="34" charset="-122"/>
+                <a:cs typeface="Calibri" pitchFamily="34" charset="-120"/>
+              </a:rPr>
+              <a:t>  ·  </a:t>
+            </a:r>
+            <a:r>
+              <a:rPr lang="sr-Cyrl-RS" sz="1000" dirty="0">
+                <a:solidFill>
+                  <a:srgbClr val="5B6B7F"/>
+                </a:solidFill>
+                <a:latin typeface="Calibri" pitchFamily="34" charset="0"/>
+                <a:ea typeface="Calibri" pitchFamily="34" charset="-122"/>
+                <a:cs typeface="Calibri" pitchFamily="34" charset="-120"/>
+              </a:rPr>
+              <a:t>Прекомерно одбијање и компромис између поравнања и корисности код ресурсно ограничених локалних језичких модела</a:t>
             </a:r>
             <a:endParaRPr lang="en-US" sz="1000" dirty="0"/>
           </a:p>
@@ -35871,7 +36571,7 @@
         <p:spPr>
           <a:xfrm>
             <a:off x="548640" y="6419088"/>
-            <a:ext cx="7315200" cy="237744"/>
+            <a:ext cx="7818120" cy="237744"/>
           </a:xfrm>
           <a:prstGeom prst="rect">
             <a:avLst/>
@@ -35883,9 +36583,17 @@
           <a:bodyPr wrap="square" lIns="0" tIns="0" rIns="0" bIns="0" rtlCol="0" anchor="ctr"/>
           <a:lstStyle/>
           <a:p>
-            <a:pPr marL="0" indent="0">
-              <a:buNone/>
-            </a:pPr>
+            <a:r>
+              <a:rPr lang="sr-Cyrl-RS" sz="1000" dirty="0">
+                <a:solidFill>
+                  <a:srgbClr val="5B6B7F"/>
+                </a:solidFill>
+                <a:latin typeface="Calibri" pitchFamily="34" charset="0"/>
+                <a:ea typeface="Calibri" pitchFamily="34" charset="-122"/>
+                <a:cs typeface="Calibri" pitchFamily="34" charset="-120"/>
+              </a:rPr>
+              <a:t>Борис</a:t>
+            </a:r>
             <a:r>
               <a:rPr lang="en-US" sz="1000" dirty="0">
                 <a:solidFill>
@@ -35895,7 +36603,40 @@
                 <a:ea typeface="Calibri" pitchFamily="34" charset="-122"/>
                 <a:cs typeface="Calibri" pitchFamily="34" charset="-120"/>
               </a:rPr>
-              <a:t>Б. Летић  ·  Прекомерно одбијање код локалних језичких модела</a:t>
+              <a:t> </a:t>
+            </a:r>
+            <a:r>
+              <a:rPr lang="sr-Cyrl-RS" sz="1000" dirty="0">
+                <a:solidFill>
+                  <a:srgbClr val="5B6B7F"/>
+                </a:solidFill>
+                <a:latin typeface="Calibri" pitchFamily="34" charset="0"/>
+                <a:ea typeface="Calibri" pitchFamily="34" charset="-122"/>
+                <a:cs typeface="Calibri" pitchFamily="34" charset="-120"/>
+              </a:rPr>
+              <a:t>Летић</a:t>
+            </a:r>
+            <a:r>
+              <a:rPr lang="en-US" sz="1000" dirty="0">
+                <a:solidFill>
+                  <a:srgbClr val="5B6B7F"/>
+                </a:solidFill>
+                <a:latin typeface="Calibri" pitchFamily="34" charset="0"/>
+                <a:ea typeface="Calibri" pitchFamily="34" charset="-122"/>
+                <a:cs typeface="Calibri" pitchFamily="34" charset="-120"/>
+              </a:rPr>
+              <a:t>  ·  </a:t>
+            </a:r>
+            <a:r>
+              <a:rPr lang="sr-Cyrl-RS" sz="1000" dirty="0">
+                <a:solidFill>
+                  <a:srgbClr val="5B6B7F"/>
+                </a:solidFill>
+                <a:latin typeface="Calibri" pitchFamily="34" charset="0"/>
+                <a:ea typeface="Calibri" pitchFamily="34" charset="-122"/>
+                <a:cs typeface="Calibri" pitchFamily="34" charset="-120"/>
+              </a:rPr>
+              <a:t>Прекомерно одбијање и компромис између поравнања и корисности код ресурсно ограничених локалних језичких модела</a:t>
             </a:r>
             <a:endParaRPr lang="en-US" sz="1000" dirty="0"/>
           </a:p>
@@ -37248,7 +37989,7 @@
         <p:spPr>
           <a:xfrm>
             <a:off x="548640" y="6419088"/>
-            <a:ext cx="7315200" cy="237744"/>
+            <a:ext cx="8017390" cy="237744"/>
           </a:xfrm>
           <a:prstGeom prst="rect">
             <a:avLst/>
@@ -37260,9 +38001,17 @@
           <a:bodyPr wrap="square" lIns="0" tIns="0" rIns="0" bIns="0" rtlCol="0" anchor="ctr"/>
           <a:lstStyle/>
           <a:p>
-            <a:pPr marL="0" indent="0">
-              <a:buNone/>
-            </a:pPr>
+            <a:r>
+              <a:rPr lang="sr-Cyrl-RS" sz="1000" dirty="0">
+                <a:solidFill>
+                  <a:srgbClr val="5B6B7F"/>
+                </a:solidFill>
+                <a:latin typeface="Calibri" pitchFamily="34" charset="0"/>
+                <a:ea typeface="Calibri" pitchFamily="34" charset="-122"/>
+                <a:cs typeface="Calibri" pitchFamily="34" charset="-120"/>
+              </a:rPr>
+              <a:t>Борис</a:t>
+            </a:r>
             <a:r>
               <a:rPr lang="en-US" sz="1000" dirty="0">
                 <a:solidFill>
@@ -37272,7 +38021,40 @@
                 <a:ea typeface="Calibri" pitchFamily="34" charset="-122"/>
                 <a:cs typeface="Calibri" pitchFamily="34" charset="-120"/>
               </a:rPr>
-              <a:t>Б. Летић  ·  Прекомерно одбијање код локалних језичких модела</a:t>
+              <a:t> </a:t>
+            </a:r>
+            <a:r>
+              <a:rPr lang="sr-Cyrl-RS" sz="1000" dirty="0">
+                <a:solidFill>
+                  <a:srgbClr val="5B6B7F"/>
+                </a:solidFill>
+                <a:latin typeface="Calibri" pitchFamily="34" charset="0"/>
+                <a:ea typeface="Calibri" pitchFamily="34" charset="-122"/>
+                <a:cs typeface="Calibri" pitchFamily="34" charset="-120"/>
+              </a:rPr>
+              <a:t>Летић</a:t>
+            </a:r>
+            <a:r>
+              <a:rPr lang="en-US" sz="1000" dirty="0">
+                <a:solidFill>
+                  <a:srgbClr val="5B6B7F"/>
+                </a:solidFill>
+                <a:latin typeface="Calibri" pitchFamily="34" charset="0"/>
+                <a:ea typeface="Calibri" pitchFamily="34" charset="-122"/>
+                <a:cs typeface="Calibri" pitchFamily="34" charset="-120"/>
+              </a:rPr>
+              <a:t>  ·  </a:t>
+            </a:r>
+            <a:r>
+              <a:rPr lang="sr-Cyrl-RS" sz="1000" dirty="0">
+                <a:solidFill>
+                  <a:srgbClr val="5B6B7F"/>
+                </a:solidFill>
+                <a:latin typeface="Calibri" pitchFamily="34" charset="0"/>
+                <a:ea typeface="Calibri" pitchFamily="34" charset="-122"/>
+                <a:cs typeface="Calibri" pitchFamily="34" charset="-120"/>
+              </a:rPr>
+              <a:t>Прекомерно одбијање и компромис између поравнања и корисности код ресурсно ограничених локалних језичких модела</a:t>
             </a:r>
             <a:endParaRPr lang="en-US" sz="1000" dirty="0"/>
           </a:p>
@@ -38464,7 +39246,7 @@
         <p:spPr>
           <a:xfrm>
             <a:off x="548640" y="6419088"/>
-            <a:ext cx="7315200" cy="237744"/>
+            <a:ext cx="7922500" cy="237744"/>
           </a:xfrm>
           <a:prstGeom prst="rect">
             <a:avLst/>
@@ -38476,9 +39258,17 @@
           <a:bodyPr wrap="square" lIns="0" tIns="0" rIns="0" bIns="0" rtlCol="0" anchor="ctr"/>
           <a:lstStyle/>
           <a:p>
-            <a:pPr marL="0" indent="0">
-              <a:buNone/>
-            </a:pPr>
+            <a:r>
+              <a:rPr lang="sr-Cyrl-RS" sz="1000" dirty="0">
+                <a:solidFill>
+                  <a:srgbClr val="5B6B7F"/>
+                </a:solidFill>
+                <a:latin typeface="Calibri" pitchFamily="34" charset="0"/>
+                <a:ea typeface="Calibri" pitchFamily="34" charset="-122"/>
+                <a:cs typeface="Calibri" pitchFamily="34" charset="-120"/>
+              </a:rPr>
+              <a:t>Борис</a:t>
+            </a:r>
             <a:r>
               <a:rPr lang="en-US" sz="1000" dirty="0">
                 <a:solidFill>
@@ -38488,7 +39278,40 @@
                 <a:ea typeface="Calibri" pitchFamily="34" charset="-122"/>
                 <a:cs typeface="Calibri" pitchFamily="34" charset="-120"/>
               </a:rPr>
-              <a:t>Б. Летић  ·  Прекомерно одбијање код локалних језичких модела</a:t>
+              <a:t> </a:t>
+            </a:r>
+            <a:r>
+              <a:rPr lang="sr-Cyrl-RS" sz="1000" dirty="0">
+                <a:solidFill>
+                  <a:srgbClr val="5B6B7F"/>
+                </a:solidFill>
+                <a:latin typeface="Calibri" pitchFamily="34" charset="0"/>
+                <a:ea typeface="Calibri" pitchFamily="34" charset="-122"/>
+                <a:cs typeface="Calibri" pitchFamily="34" charset="-120"/>
+              </a:rPr>
+              <a:t>Летић</a:t>
+            </a:r>
+            <a:r>
+              <a:rPr lang="en-US" sz="1000" dirty="0">
+                <a:solidFill>
+                  <a:srgbClr val="5B6B7F"/>
+                </a:solidFill>
+                <a:latin typeface="Calibri" pitchFamily="34" charset="0"/>
+                <a:ea typeface="Calibri" pitchFamily="34" charset="-122"/>
+                <a:cs typeface="Calibri" pitchFamily="34" charset="-120"/>
+              </a:rPr>
+              <a:t>  ·  </a:t>
+            </a:r>
+            <a:r>
+              <a:rPr lang="sr-Cyrl-RS" sz="1000" dirty="0">
+                <a:solidFill>
+                  <a:srgbClr val="5B6B7F"/>
+                </a:solidFill>
+                <a:latin typeface="Calibri" pitchFamily="34" charset="0"/>
+                <a:ea typeface="Calibri" pitchFamily="34" charset="-122"/>
+                <a:cs typeface="Calibri" pitchFamily="34" charset="-120"/>
+              </a:rPr>
+              <a:t>Прекомерно одбијање и компромис између поравнања и корисности код ресурсно ограничених локалних језичких модела</a:t>
             </a:r>
             <a:endParaRPr lang="en-US" sz="1000" dirty="0"/>
           </a:p>
@@ -39553,7 +40376,7 @@
         <p:spPr>
           <a:xfrm>
             <a:off x="548640" y="6419088"/>
-            <a:ext cx="7315200" cy="237744"/>
+            <a:ext cx="7801730" cy="237744"/>
           </a:xfrm>
           <a:prstGeom prst="rect">
             <a:avLst/>
@@ -39565,9 +40388,17 @@
           <a:bodyPr wrap="square" lIns="0" tIns="0" rIns="0" bIns="0" rtlCol="0" anchor="ctr"/>
           <a:lstStyle/>
           <a:p>
-            <a:pPr marL="0" indent="0">
-              <a:buNone/>
-            </a:pPr>
+            <a:r>
+              <a:rPr lang="sr-Cyrl-RS" sz="1000" dirty="0">
+                <a:solidFill>
+                  <a:srgbClr val="5B6B7F"/>
+                </a:solidFill>
+                <a:latin typeface="Calibri" pitchFamily="34" charset="0"/>
+                <a:ea typeface="Calibri" pitchFamily="34" charset="-122"/>
+                <a:cs typeface="Calibri" pitchFamily="34" charset="-120"/>
+              </a:rPr>
+              <a:t>Борис</a:t>
+            </a:r>
             <a:r>
               <a:rPr lang="en-US" sz="1000" dirty="0">
                 <a:solidFill>
@@ -39577,7 +40408,40 @@
                 <a:ea typeface="Calibri" pitchFamily="34" charset="-122"/>
                 <a:cs typeface="Calibri" pitchFamily="34" charset="-120"/>
               </a:rPr>
-              <a:t>Б. Летић  ·  Прекомерно одбијање код локалних језичких модела</a:t>
+              <a:t> </a:t>
+            </a:r>
+            <a:r>
+              <a:rPr lang="sr-Cyrl-RS" sz="1000" dirty="0">
+                <a:solidFill>
+                  <a:srgbClr val="5B6B7F"/>
+                </a:solidFill>
+                <a:latin typeface="Calibri" pitchFamily="34" charset="0"/>
+                <a:ea typeface="Calibri" pitchFamily="34" charset="-122"/>
+                <a:cs typeface="Calibri" pitchFamily="34" charset="-120"/>
+              </a:rPr>
+              <a:t>Летић</a:t>
+            </a:r>
+            <a:r>
+              <a:rPr lang="en-US" sz="1000" dirty="0">
+                <a:solidFill>
+                  <a:srgbClr val="5B6B7F"/>
+                </a:solidFill>
+                <a:latin typeface="Calibri" pitchFamily="34" charset="0"/>
+                <a:ea typeface="Calibri" pitchFamily="34" charset="-122"/>
+                <a:cs typeface="Calibri" pitchFamily="34" charset="-120"/>
+              </a:rPr>
+              <a:t>  ·  </a:t>
+            </a:r>
+            <a:r>
+              <a:rPr lang="sr-Cyrl-RS" sz="1000" dirty="0">
+                <a:solidFill>
+                  <a:srgbClr val="5B6B7F"/>
+                </a:solidFill>
+                <a:latin typeface="Calibri" pitchFamily="34" charset="0"/>
+                <a:ea typeface="Calibri" pitchFamily="34" charset="-122"/>
+                <a:cs typeface="Calibri" pitchFamily="34" charset="-120"/>
+              </a:rPr>
+              <a:t>Прекомерно одбијање и компромис између поравнања и корисности код ресурсно ограничених локалних језичких модела</a:t>
             </a:r>
             <a:endParaRPr lang="en-US" sz="1000" dirty="0"/>
           </a:p>
@@ -40616,7 +41480,7 @@
         <p:spPr>
           <a:xfrm>
             <a:off x="548640" y="6419088"/>
-            <a:ext cx="7315200" cy="237744"/>
+            <a:ext cx="7635240" cy="237744"/>
           </a:xfrm>
           <a:prstGeom prst="rect">
             <a:avLst/>
@@ -40628,9 +41492,17 @@
           <a:bodyPr wrap="square" lIns="0" tIns="0" rIns="0" bIns="0" rtlCol="0" anchor="ctr"/>
           <a:lstStyle/>
           <a:p>
-            <a:pPr marL="0" indent="0">
-              <a:buNone/>
-            </a:pPr>
+            <a:r>
+              <a:rPr lang="sr-Cyrl-RS" sz="1000" dirty="0">
+                <a:solidFill>
+                  <a:srgbClr val="5B6B7F"/>
+                </a:solidFill>
+                <a:latin typeface="Calibri" pitchFamily="34" charset="0"/>
+                <a:ea typeface="Calibri" pitchFamily="34" charset="-122"/>
+                <a:cs typeface="Calibri" pitchFamily="34" charset="-120"/>
+              </a:rPr>
+              <a:t>Борис</a:t>
+            </a:r>
             <a:r>
               <a:rPr lang="en-US" sz="1000" dirty="0">
                 <a:solidFill>
@@ -40640,7 +41512,40 @@
                 <a:ea typeface="Calibri" pitchFamily="34" charset="-122"/>
                 <a:cs typeface="Calibri" pitchFamily="34" charset="-120"/>
               </a:rPr>
-              <a:t>Б. Летић  ·  Прекомерно одбијање код локалних језичких модела</a:t>
+              <a:t> </a:t>
+            </a:r>
+            <a:r>
+              <a:rPr lang="sr-Cyrl-RS" sz="1000" dirty="0">
+                <a:solidFill>
+                  <a:srgbClr val="5B6B7F"/>
+                </a:solidFill>
+                <a:latin typeface="Calibri" pitchFamily="34" charset="0"/>
+                <a:ea typeface="Calibri" pitchFamily="34" charset="-122"/>
+                <a:cs typeface="Calibri" pitchFamily="34" charset="-120"/>
+              </a:rPr>
+              <a:t>Летић</a:t>
+            </a:r>
+            <a:r>
+              <a:rPr lang="en-US" sz="1000" dirty="0">
+                <a:solidFill>
+                  <a:srgbClr val="5B6B7F"/>
+                </a:solidFill>
+                <a:latin typeface="Calibri" pitchFamily="34" charset="0"/>
+                <a:ea typeface="Calibri" pitchFamily="34" charset="-122"/>
+                <a:cs typeface="Calibri" pitchFamily="34" charset="-120"/>
+              </a:rPr>
+              <a:t>  ·  </a:t>
+            </a:r>
+            <a:r>
+              <a:rPr lang="sr-Cyrl-RS" sz="1000" dirty="0">
+                <a:solidFill>
+                  <a:srgbClr val="5B6B7F"/>
+                </a:solidFill>
+                <a:latin typeface="Calibri" pitchFamily="34" charset="0"/>
+                <a:ea typeface="Calibri" pitchFamily="34" charset="-122"/>
+                <a:cs typeface="Calibri" pitchFamily="34" charset="-120"/>
+              </a:rPr>
+              <a:t>Прекомерно одбијање и компромис између поравнања и корисности код ресурсно ограничених локалних језичких модела</a:t>
             </a:r>
             <a:endParaRPr lang="en-US" sz="1000" dirty="0"/>
           </a:p>
@@ -42491,8 +43396,8 @@
         </p:nvSpPr>
         <p:spPr>
           <a:xfrm>
-            <a:off x="548640" y="6419088"/>
-            <a:ext cx="7315200" cy="237744"/>
+            <a:off x="548639" y="6419088"/>
+            <a:ext cx="7663707" cy="237744"/>
           </a:xfrm>
           <a:prstGeom prst="rect">
             <a:avLst/>
@@ -42504,9 +43409,17 @@
           <a:bodyPr wrap="square" lIns="0" tIns="0" rIns="0" bIns="0" rtlCol="0" anchor="ctr"/>
           <a:lstStyle/>
           <a:p>
-            <a:pPr marL="0" indent="0">
-              <a:buNone/>
-            </a:pPr>
+            <a:r>
+              <a:rPr lang="sr-Cyrl-RS" sz="1000" dirty="0">
+                <a:solidFill>
+                  <a:srgbClr val="5B6B7F"/>
+                </a:solidFill>
+                <a:latin typeface="Calibri" pitchFamily="34" charset="0"/>
+                <a:ea typeface="Calibri" pitchFamily="34" charset="-122"/>
+                <a:cs typeface="Calibri" pitchFamily="34" charset="-120"/>
+              </a:rPr>
+              <a:t>Борис</a:t>
+            </a:r>
             <a:r>
               <a:rPr lang="en-US" sz="1000" dirty="0">
                 <a:solidFill>
@@ -42516,7 +43429,40 @@
                 <a:ea typeface="Calibri" pitchFamily="34" charset="-122"/>
                 <a:cs typeface="Calibri" pitchFamily="34" charset="-120"/>
               </a:rPr>
-              <a:t>Б. Летић  ·  Прекомерно одбијање код локалних језичких модела</a:t>
+              <a:t> </a:t>
+            </a:r>
+            <a:r>
+              <a:rPr lang="sr-Cyrl-RS" sz="1000" dirty="0">
+                <a:solidFill>
+                  <a:srgbClr val="5B6B7F"/>
+                </a:solidFill>
+                <a:latin typeface="Calibri" pitchFamily="34" charset="0"/>
+                <a:ea typeface="Calibri" pitchFamily="34" charset="-122"/>
+                <a:cs typeface="Calibri" pitchFamily="34" charset="-120"/>
+              </a:rPr>
+              <a:t>Летић</a:t>
+            </a:r>
+            <a:r>
+              <a:rPr lang="en-US" sz="1000" dirty="0">
+                <a:solidFill>
+                  <a:srgbClr val="5B6B7F"/>
+                </a:solidFill>
+                <a:latin typeface="Calibri" pitchFamily="34" charset="0"/>
+                <a:ea typeface="Calibri" pitchFamily="34" charset="-122"/>
+                <a:cs typeface="Calibri" pitchFamily="34" charset="-120"/>
+              </a:rPr>
+              <a:t>  ·  </a:t>
+            </a:r>
+            <a:r>
+              <a:rPr lang="sr-Cyrl-RS" sz="1000" dirty="0">
+                <a:solidFill>
+                  <a:srgbClr val="5B6B7F"/>
+                </a:solidFill>
+                <a:latin typeface="Calibri" pitchFamily="34" charset="0"/>
+                <a:ea typeface="Calibri" pitchFamily="34" charset="-122"/>
+                <a:cs typeface="Calibri" pitchFamily="34" charset="-120"/>
+              </a:rPr>
+              <a:t>Прекомерно одбијање и компромис између поравнања и корисности код ресурсно ограничених локалних језичких модела</a:t>
             </a:r>
             <a:endParaRPr lang="en-US" sz="1000" dirty="0"/>
           </a:p>
@@ -43540,7 +44486,7 @@
         <p:spPr>
           <a:xfrm>
             <a:off x="548640" y="6419088"/>
-            <a:ext cx="7315200" cy="237744"/>
+            <a:ext cx="7689586" cy="237744"/>
           </a:xfrm>
           <a:prstGeom prst="rect">
             <a:avLst/>
@@ -43552,9 +44498,17 @@
           <a:bodyPr wrap="square" lIns="0" tIns="0" rIns="0" bIns="0" rtlCol="0" anchor="ctr"/>
           <a:lstStyle/>
           <a:p>
-            <a:pPr marL="0" indent="0">
-              <a:buNone/>
-            </a:pPr>
+            <a:r>
+              <a:rPr lang="sr-Cyrl-RS" sz="1000" dirty="0">
+                <a:solidFill>
+                  <a:srgbClr val="5B6B7F"/>
+                </a:solidFill>
+                <a:latin typeface="Calibri" pitchFamily="34" charset="0"/>
+                <a:ea typeface="Calibri" pitchFamily="34" charset="-122"/>
+                <a:cs typeface="Calibri" pitchFamily="34" charset="-120"/>
+              </a:rPr>
+              <a:t>Борис</a:t>
+            </a:r>
             <a:r>
               <a:rPr lang="en-US" sz="1000" dirty="0">
                 <a:solidFill>
@@ -43564,7 +44518,40 @@
                 <a:ea typeface="Calibri" pitchFamily="34" charset="-122"/>
                 <a:cs typeface="Calibri" pitchFamily="34" charset="-120"/>
               </a:rPr>
-              <a:t>Б. Летић  ·  Прекомерно одбијање код локалних језичких модела</a:t>
+              <a:t> </a:t>
+            </a:r>
+            <a:r>
+              <a:rPr lang="sr-Cyrl-RS" sz="1000" dirty="0">
+                <a:solidFill>
+                  <a:srgbClr val="5B6B7F"/>
+                </a:solidFill>
+                <a:latin typeface="Calibri" pitchFamily="34" charset="0"/>
+                <a:ea typeface="Calibri" pitchFamily="34" charset="-122"/>
+                <a:cs typeface="Calibri" pitchFamily="34" charset="-120"/>
+              </a:rPr>
+              <a:t>Летић</a:t>
+            </a:r>
+            <a:r>
+              <a:rPr lang="en-US" sz="1000" dirty="0">
+                <a:solidFill>
+                  <a:srgbClr val="5B6B7F"/>
+                </a:solidFill>
+                <a:latin typeface="Calibri" pitchFamily="34" charset="0"/>
+                <a:ea typeface="Calibri" pitchFamily="34" charset="-122"/>
+                <a:cs typeface="Calibri" pitchFamily="34" charset="-120"/>
+              </a:rPr>
+              <a:t>  ·  </a:t>
+            </a:r>
+            <a:r>
+              <a:rPr lang="sr-Cyrl-RS" sz="1000" dirty="0">
+                <a:solidFill>
+                  <a:srgbClr val="5B6B7F"/>
+                </a:solidFill>
+                <a:latin typeface="Calibri" pitchFamily="34" charset="0"/>
+                <a:ea typeface="Calibri" pitchFamily="34" charset="-122"/>
+                <a:cs typeface="Calibri" pitchFamily="34" charset="-120"/>
+              </a:rPr>
+              <a:t>Прекомерно одбијање и компромис између поравнања и корисности код ресурсно ограничених локалних језичких модела</a:t>
             </a:r>
             <a:endParaRPr lang="en-US" sz="1000" dirty="0"/>
           </a:p>
@@ -44525,7 +45512,7 @@
         <p:spPr>
           <a:xfrm>
             <a:off x="548640" y="6419088"/>
-            <a:ext cx="7315200" cy="237744"/>
+            <a:ext cx="7689586" cy="237744"/>
           </a:xfrm>
           <a:prstGeom prst="rect">
             <a:avLst/>
@@ -44537,9 +45524,17 @@
           <a:bodyPr wrap="square" lIns="0" tIns="0" rIns="0" bIns="0" rtlCol="0" anchor="ctr"/>
           <a:lstStyle/>
           <a:p>
-            <a:pPr marL="0" indent="0">
-              <a:buNone/>
-            </a:pPr>
+            <a:r>
+              <a:rPr lang="sr-Cyrl-RS" sz="1000" dirty="0">
+                <a:solidFill>
+                  <a:srgbClr val="5B6B7F"/>
+                </a:solidFill>
+                <a:latin typeface="Calibri" pitchFamily="34" charset="0"/>
+                <a:ea typeface="Calibri" pitchFamily="34" charset="-122"/>
+                <a:cs typeface="Calibri" pitchFamily="34" charset="-120"/>
+              </a:rPr>
+              <a:t>Борис</a:t>
+            </a:r>
             <a:r>
               <a:rPr lang="en-US" sz="1000" dirty="0">
                 <a:solidFill>
@@ -44549,7 +45544,40 @@
                 <a:ea typeface="Calibri" pitchFamily="34" charset="-122"/>
                 <a:cs typeface="Calibri" pitchFamily="34" charset="-120"/>
               </a:rPr>
-              <a:t>Б. Летић  ·  Прекомерно одбијање код локалних језичких модела</a:t>
+              <a:t> </a:t>
+            </a:r>
+            <a:r>
+              <a:rPr lang="sr-Cyrl-RS" sz="1000" dirty="0">
+                <a:solidFill>
+                  <a:srgbClr val="5B6B7F"/>
+                </a:solidFill>
+                <a:latin typeface="Calibri" pitchFamily="34" charset="0"/>
+                <a:ea typeface="Calibri" pitchFamily="34" charset="-122"/>
+                <a:cs typeface="Calibri" pitchFamily="34" charset="-120"/>
+              </a:rPr>
+              <a:t>Летић</a:t>
+            </a:r>
+            <a:r>
+              <a:rPr lang="en-US" sz="1000" dirty="0">
+                <a:solidFill>
+                  <a:srgbClr val="5B6B7F"/>
+                </a:solidFill>
+                <a:latin typeface="Calibri" pitchFamily="34" charset="0"/>
+                <a:ea typeface="Calibri" pitchFamily="34" charset="-122"/>
+                <a:cs typeface="Calibri" pitchFamily="34" charset="-120"/>
+              </a:rPr>
+              <a:t>  ·  </a:t>
+            </a:r>
+            <a:r>
+              <a:rPr lang="sr-Cyrl-RS" sz="1000" dirty="0">
+                <a:solidFill>
+                  <a:srgbClr val="5B6B7F"/>
+                </a:solidFill>
+                <a:latin typeface="Calibri" pitchFamily="34" charset="0"/>
+                <a:ea typeface="Calibri" pitchFamily="34" charset="-122"/>
+                <a:cs typeface="Calibri" pitchFamily="34" charset="-120"/>
+              </a:rPr>
+              <a:t>Прекомерно одбијање и компромис између поравнања и корисности код ресурсно ограничених локалних језичких модела</a:t>
             </a:r>
             <a:endParaRPr lang="en-US" sz="1000" dirty="0"/>
           </a:p>
@@ -45563,8 +46591,8 @@
         </p:nvSpPr>
         <p:spPr>
           <a:xfrm>
-            <a:off x="548640" y="6419088"/>
-            <a:ext cx="7315200" cy="237744"/>
+            <a:off x="548639" y="6419088"/>
+            <a:ext cx="7655081" cy="237744"/>
           </a:xfrm>
           <a:prstGeom prst="rect">
             <a:avLst/>
@@ -45576,9 +46604,17 @@
           <a:bodyPr wrap="square" lIns="0" tIns="0" rIns="0" bIns="0" rtlCol="0" anchor="ctr"/>
           <a:lstStyle/>
           <a:p>
-            <a:pPr marL="0" indent="0">
-              <a:buNone/>
-            </a:pPr>
+            <a:r>
+              <a:rPr lang="sr-Cyrl-RS" sz="1000" dirty="0">
+                <a:solidFill>
+                  <a:srgbClr val="5B6B7F"/>
+                </a:solidFill>
+                <a:latin typeface="Calibri" pitchFamily="34" charset="0"/>
+                <a:ea typeface="Calibri" pitchFamily="34" charset="-122"/>
+                <a:cs typeface="Calibri" pitchFamily="34" charset="-120"/>
+              </a:rPr>
+              <a:t>Борис</a:t>
+            </a:r>
             <a:r>
               <a:rPr lang="en-US" sz="1000" dirty="0">
                 <a:solidFill>
@@ -45588,7 +46624,40 @@
                 <a:ea typeface="Calibri" pitchFamily="34" charset="-122"/>
                 <a:cs typeface="Calibri" pitchFamily="34" charset="-120"/>
               </a:rPr>
-              <a:t>Б. Летић  ·  Прекомерно одбијање код локалних језичких модела</a:t>
+              <a:t> </a:t>
+            </a:r>
+            <a:r>
+              <a:rPr lang="sr-Cyrl-RS" sz="1000" dirty="0">
+                <a:solidFill>
+                  <a:srgbClr val="5B6B7F"/>
+                </a:solidFill>
+                <a:latin typeface="Calibri" pitchFamily="34" charset="0"/>
+                <a:ea typeface="Calibri" pitchFamily="34" charset="-122"/>
+                <a:cs typeface="Calibri" pitchFamily="34" charset="-120"/>
+              </a:rPr>
+              <a:t>Летић</a:t>
+            </a:r>
+            <a:r>
+              <a:rPr lang="en-US" sz="1000" dirty="0">
+                <a:solidFill>
+                  <a:srgbClr val="5B6B7F"/>
+                </a:solidFill>
+                <a:latin typeface="Calibri" pitchFamily="34" charset="0"/>
+                <a:ea typeface="Calibri" pitchFamily="34" charset="-122"/>
+                <a:cs typeface="Calibri" pitchFamily="34" charset="-120"/>
+              </a:rPr>
+              <a:t>  ·  </a:t>
+            </a:r>
+            <a:r>
+              <a:rPr lang="sr-Cyrl-RS" sz="1000" dirty="0">
+                <a:solidFill>
+                  <a:srgbClr val="5B6B7F"/>
+                </a:solidFill>
+                <a:latin typeface="Calibri" pitchFamily="34" charset="0"/>
+                <a:ea typeface="Calibri" pitchFamily="34" charset="-122"/>
+                <a:cs typeface="Calibri" pitchFamily="34" charset="-120"/>
+              </a:rPr>
+              <a:t>Прекомерно одбијање и компромис између поравнања и корисности код ресурсно ограничених локалних језичких модела</a:t>
             </a:r>
             <a:endParaRPr lang="en-US" sz="1000" dirty="0"/>
           </a:p>
@@ -46799,7 +47868,7 @@
         <p:spPr>
           <a:xfrm>
             <a:off x="548640" y="6419088"/>
-            <a:ext cx="7315200" cy="237744"/>
+            <a:ext cx="7922500" cy="237744"/>
           </a:xfrm>
           <a:prstGeom prst="rect">
             <a:avLst/>
@@ -46811,9 +47880,17 @@
           <a:bodyPr wrap="square" lIns="0" tIns="0" rIns="0" bIns="0" rtlCol="0" anchor="ctr"/>
           <a:lstStyle/>
           <a:p>
-            <a:pPr marL="0" indent="0">
-              <a:buNone/>
-            </a:pPr>
+            <a:r>
+              <a:rPr lang="sr-Cyrl-RS" sz="1000" dirty="0">
+                <a:solidFill>
+                  <a:srgbClr val="5B6B7F"/>
+                </a:solidFill>
+                <a:latin typeface="Calibri" pitchFamily="34" charset="0"/>
+                <a:ea typeface="Calibri" pitchFamily="34" charset="-122"/>
+                <a:cs typeface="Calibri" pitchFamily="34" charset="-120"/>
+              </a:rPr>
+              <a:t>Борис</a:t>
+            </a:r>
             <a:r>
               <a:rPr lang="en-US" sz="1000" dirty="0">
                 <a:solidFill>
@@ -46823,7 +47900,40 @@
                 <a:ea typeface="Calibri" pitchFamily="34" charset="-122"/>
                 <a:cs typeface="Calibri" pitchFamily="34" charset="-120"/>
               </a:rPr>
-              <a:t>Б. Летић  ·  Прекомерно одбијање код локалних језичких модела</a:t>
+              <a:t> </a:t>
+            </a:r>
+            <a:r>
+              <a:rPr lang="sr-Cyrl-RS" sz="1000" dirty="0">
+                <a:solidFill>
+                  <a:srgbClr val="5B6B7F"/>
+                </a:solidFill>
+                <a:latin typeface="Calibri" pitchFamily="34" charset="0"/>
+                <a:ea typeface="Calibri" pitchFamily="34" charset="-122"/>
+                <a:cs typeface="Calibri" pitchFamily="34" charset="-120"/>
+              </a:rPr>
+              <a:t>Летић</a:t>
+            </a:r>
+            <a:r>
+              <a:rPr lang="en-US" sz="1000" dirty="0">
+                <a:solidFill>
+                  <a:srgbClr val="5B6B7F"/>
+                </a:solidFill>
+                <a:latin typeface="Calibri" pitchFamily="34" charset="0"/>
+                <a:ea typeface="Calibri" pitchFamily="34" charset="-122"/>
+                <a:cs typeface="Calibri" pitchFamily="34" charset="-120"/>
+              </a:rPr>
+              <a:t>  ·  </a:t>
+            </a:r>
+            <a:r>
+              <a:rPr lang="sr-Cyrl-RS" sz="1000" dirty="0">
+                <a:solidFill>
+                  <a:srgbClr val="5B6B7F"/>
+                </a:solidFill>
+                <a:latin typeface="Calibri" pitchFamily="34" charset="0"/>
+                <a:ea typeface="Calibri" pitchFamily="34" charset="-122"/>
+                <a:cs typeface="Calibri" pitchFamily="34" charset="-120"/>
+              </a:rPr>
+              <a:t>Прекомерно одбијање и компромис између поравнања и корисности код ресурсно ограничених локалних језичких модела</a:t>
             </a:r>
             <a:endParaRPr lang="en-US" sz="1000" dirty="0"/>
           </a:p>
@@ -47997,7 +49107,7 @@
         <p:spPr>
           <a:xfrm>
             <a:off x="548640" y="6419088"/>
-            <a:ext cx="7315200" cy="237744"/>
+            <a:ext cx="8092440" cy="237744"/>
           </a:xfrm>
           <a:prstGeom prst="rect">
             <a:avLst/>
@@ -48009,9 +49119,17 @@
           <a:bodyPr wrap="square" lIns="0" tIns="0" rIns="0" bIns="0" rtlCol="0" anchor="ctr"/>
           <a:lstStyle/>
           <a:p>
-            <a:pPr marL="0" indent="0">
-              <a:buNone/>
-            </a:pPr>
+            <a:r>
+              <a:rPr lang="sr-Cyrl-RS" sz="1000" dirty="0">
+                <a:solidFill>
+                  <a:srgbClr val="5B6B7F"/>
+                </a:solidFill>
+                <a:latin typeface="Calibri" pitchFamily="34" charset="0"/>
+                <a:ea typeface="Calibri" pitchFamily="34" charset="-122"/>
+                <a:cs typeface="Calibri" pitchFamily="34" charset="-120"/>
+              </a:rPr>
+              <a:t>Борис</a:t>
+            </a:r>
             <a:r>
               <a:rPr lang="en-US" sz="1000" dirty="0">
                 <a:solidFill>
@@ -48021,7 +49139,40 @@
                 <a:ea typeface="Calibri" pitchFamily="34" charset="-122"/>
                 <a:cs typeface="Calibri" pitchFamily="34" charset="-120"/>
               </a:rPr>
-              <a:t>Б. Летић  ·  Прекомерно одбијање код локалних језичких модела</a:t>
+              <a:t> </a:t>
+            </a:r>
+            <a:r>
+              <a:rPr lang="sr-Cyrl-RS" sz="1000" dirty="0">
+                <a:solidFill>
+                  <a:srgbClr val="5B6B7F"/>
+                </a:solidFill>
+                <a:latin typeface="Calibri" pitchFamily="34" charset="0"/>
+                <a:ea typeface="Calibri" pitchFamily="34" charset="-122"/>
+                <a:cs typeface="Calibri" pitchFamily="34" charset="-120"/>
+              </a:rPr>
+              <a:t>Летић</a:t>
+            </a:r>
+            <a:r>
+              <a:rPr lang="en-US" sz="1000" dirty="0">
+                <a:solidFill>
+                  <a:srgbClr val="5B6B7F"/>
+                </a:solidFill>
+                <a:latin typeface="Calibri" pitchFamily="34" charset="0"/>
+                <a:ea typeface="Calibri" pitchFamily="34" charset="-122"/>
+                <a:cs typeface="Calibri" pitchFamily="34" charset="-120"/>
+              </a:rPr>
+              <a:t>  ·  </a:t>
+            </a:r>
+            <a:r>
+              <a:rPr lang="sr-Cyrl-RS" sz="1000" dirty="0">
+                <a:solidFill>
+                  <a:srgbClr val="5B6B7F"/>
+                </a:solidFill>
+                <a:latin typeface="Calibri" pitchFamily="34" charset="0"/>
+                <a:ea typeface="Calibri" pitchFamily="34" charset="-122"/>
+                <a:cs typeface="Calibri" pitchFamily="34" charset="-120"/>
+              </a:rPr>
+              <a:t>Прекомерно одбијање и компромис између поравнања и корисности код ресурсно ограничених локалних језичких модела</a:t>
             </a:r>
             <a:endParaRPr lang="en-US" sz="1000" dirty="0"/>
           </a:p>
